--- a/assets/pptx/catalog-109.pptx
+++ b/assets/pptx/catalog-109.pptx
@@ -3313,7 +3313,7 @@
                 <a:ea typeface="Ebrima"/>
                 <a:cs typeface="Ebrima"/>
               </a:rPr>
-              <a:t>መኖሪያዏ ነህ ኢየሱስ (2x)</a:t>
+              <a:t>መኖሪያዏ ነህ ኢየሱስ 2x</a:t>
             </a:r>
           </a:p>
           <a:p>
@@ -3349,7 +3349,7 @@
                 <a:ea typeface="Ebrima"/>
                 <a:cs typeface="Ebrima"/>
               </a:rPr>
-              <a:t>እፎይ ብያለሁ አንተን አግኝቻለሁ (2x)</a:t>
+              <a:t>እፎይ ብያለሁ አንተን አግኝቻለሁ 2x</a:t>
             </a:r>
           </a:p>
           <a:p>
@@ -3475,7 +3475,7 @@
                 <a:ea typeface="Ebrima"/>
                 <a:cs typeface="Ebrima"/>
               </a:rPr>
-              <a:t>መኖሪያዏ ነህ ኢየሱስ (2x)</a:t>
+              <a:t>መኖሪያዏ ነህ ኢየሱስ 2x</a:t>
             </a:r>
           </a:p>
           <a:p>
@@ -3511,7 +3511,7 @@
                 <a:ea typeface="Ebrima"/>
                 <a:cs typeface="Ebrima"/>
               </a:rPr>
-              <a:t>እፎይ ብያለሁ አንተን አግኝቻለሁ (2x)</a:t>
+              <a:t>እፎይ ብያለሁ አንተን አግኝቻለሁ 2x</a:t>
             </a:r>
           </a:p>
           <a:p>
@@ -3619,7 +3619,7 @@
                 <a:ea typeface="Ebrima"/>
                 <a:cs typeface="Ebrima"/>
               </a:rPr>
-              <a:t>መኖሪያዏ ነህ ኢየሱስ (2x)</a:t>
+              <a:t>መኖሪያዏ ነህ ኢየሱስ 2x</a:t>
             </a:r>
           </a:p>
           <a:p>
@@ -3655,7 +3655,7 @@
                 <a:ea typeface="Ebrima"/>
                 <a:cs typeface="Ebrima"/>
               </a:rPr>
-              <a:t>እፎይ ብያለሁ አንተን አግኝቻለሁ (2x)</a:t>
+              <a:t>እፎይ ብያለሁ አንተን አግኝቻለሁ 2x</a:t>
             </a:r>
           </a:p>
         </p:txBody>
